--- a/lectures/L11.pptx
+++ b/lectures/L11.pptx
@@ -7505,7 +7505,7 @@
           <a:p>
             <a:fld id="{2A8A781A-1859-4C85-BF75-12C8100C455E}" type="datetimeFigureOut">
               <a:rPr lang="nb-NO" smtClean="0"/>
-              <a:t>22.09.2026</a:t>
+              <a:t>28.09.2026</a:t>
             </a:fld>
             <a:endParaRPr lang="nb-NO" dirty="0"/>
           </a:p>
@@ -7682,7 +7682,7 @@
           <a:p>
             <a:fld id="{8B442447-825E-F44A-AE66-BBD0FC2F1FF6}" type="datetimeFigureOut">
               <a:rPr lang="nb-NO" smtClean="0"/>
-              <a:t>22.09.2026</a:t>
+              <a:t>28.09.2026</a:t>
             </a:fld>
             <a:endParaRPr lang="nb-NO" dirty="0"/>
           </a:p>
@@ -15966,18 +15966,37 @@
               <a:t>Alabi &amp; Urquhart (2024)</a:t>
             </a:r>
             <a:r>
-              <a:t>: a study of the English Premier League (2011–2019) found FFP improved measured profitability — clubs managed income and expenses more carefully</a:t>
-            </a:r>
-          </a:p>
-          <a:p>
-            <a:r>
+              <a:rPr dirty="0"/>
+              <a:t>: a study of the English Premier League (2011–2019) found FFP improved measured profitability</a:t>
+            </a:r>
+            <a:r>
+              <a:rPr lang="it-IT" dirty="0"/>
+              <a:t>, </a:t>
+            </a:r>
+            <a:r>
+              <a:rPr dirty="0"/>
+              <a:t>clubs managed income and expenses more carefully</a:t>
+            </a:r>
+          </a:p>
+          <a:p>
+            <a:r>
+              <a:rPr dirty="0"/>
               <a:t>But it did NOT clearly improve underlying financial sustainability</a:t>
             </a:r>
           </a:p>
           <a:p>
             <a:pPr lvl="1"/>
             <a:r>
-              <a:t>Clubs instead became more interconnected through installment-payment debt owed to each other (e.g. transfer fees paid in installments) — a new kind of interdependency risk, not necessarily less risk overall</a:t>
+              <a:rPr dirty="0"/>
+              <a:t>Clubs instead became more interconnected through installment-payment debt owed to each other (e.g. transfer fees paid in installments)</a:t>
+            </a:r>
+            <a:r>
+              <a:rPr lang="it-IT" dirty="0"/>
+              <a:t>, </a:t>
+            </a:r>
+            <a:r>
+              <a:rPr dirty="0"/>
+              <a:t> a new kind of interdependency risk, not necessarily less risk overall</a:t>
             </a:r>
           </a:p>
           <a:p>
@@ -15994,11 +16013,13 @@
               <a:t>Gallagher &amp; Quinn</a:t>
             </a:r>
             <a:r>
+              <a:rPr dirty="0"/>
               <a:t>: the break-even rule reduced average club efficiency and shifted club priorities toward financial targets over sporting ones</a:t>
             </a:r>
           </a:p>
           <a:p>
             <a:r>
+              <a:rPr dirty="0"/>
               <a:t>Takeaway: FFP achieved some of its accounting goals, but the deeper claims (financial safety, competitive balance) are much less clearly supported</a:t>
             </a:r>
           </a:p>
@@ -16045,7 +16066,16 @@
           <a:lstStyle/>
           <a:p>
             <a:r>
-              <a:t>FFP 2.0 — The Financial Sustainability Regulations (2022+)</a:t>
+              <a:rPr dirty="0"/>
+              <a:t>FFP 2.0</a:t>
+            </a:r>
+            <a:r>
+              <a:rPr lang="it-IT" dirty="0"/>
+              <a:t>:</a:t>
+            </a:r>
+            <a:r>
+              <a:rPr dirty="0"/>
+              <a:t> The Financial Sustainability Regulations (2022+)</a:t>
             </a:r>
           </a:p>
         </p:txBody>
@@ -16066,6 +16096,7 @@
           <a:lstStyle/>
           <a:p>
             <a:r>
+              <a:rPr dirty="0"/>
               <a:t>Approved April 2022, phased in from the 2022/23 season, replacing the old break-even-only approach (</a:t>
             </a:r>
             <a:r>
@@ -16081,23 +16112,35 @@
               <a:t>UEFA explainer</a:t>
             </a:r>
             <a:r>
+              <a:rPr dirty="0"/>
               <a:t>)</a:t>
             </a:r>
           </a:p>
           <a:p>
             <a:r>
+              <a:rPr dirty="0"/>
               <a:t>Three pillars: solvency, stability, and a new Squad Cost Ratio (SCR)</a:t>
             </a:r>
           </a:p>
           <a:p>
             <a:pPr lvl="1"/>
             <a:r>
+              <a:rPr dirty="0"/>
               <a:t>SCR caps spending on player/coach wages, transfer amortization, and agent fees as a percentage of club revenue</a:t>
             </a:r>
           </a:p>
           <a:p>
             <a:r>
-              <a:t>A breach triggers predefined fines plus possible sporting sanctions — more automatic and less case-by-case than the old CFCB process</a:t>
+              <a:rPr dirty="0"/>
+              <a:t>A breach triggers predefined fines plus possible sporting sanctions</a:t>
+            </a:r>
+            <a:r>
+              <a:rPr lang="it-IT" dirty="0"/>
+              <a:t>,</a:t>
+            </a:r>
+            <a:r>
+              <a:rPr dirty="0"/>
+              <a:t> more automatic and less case-by-case than the old CFCB process</a:t>
             </a:r>
           </a:p>
         </p:txBody>
@@ -16181,7 +16224,7 @@
         <p:spPr>
           <a:xfrm>
             <a:off x="500000" y="3800540"/>
-            <a:ext cx="8144000" cy="700000"/>
+            <a:ext cx="8144000" cy="253916"/>
           </a:xfrm>
           <a:prstGeom prst="rect">
             <a:avLst/>
@@ -16196,7 +16239,7 @@
           <a:p>
             <a:pPr algn="ctr"/>
             <a:r>
-              <a:rPr sz="1050" i="1"/>
+              <a:rPr sz="1050" i="1" dirty="0"/>
               <a:t>2025/26 monitoring already shows </a:t>
             </a:r>
             <a:r>
@@ -16212,8 +16255,8 @@
               <a:t>breaches by Aston Villa, Chelsea, Newcastle and Nottingham Forest</a:t>
             </a:r>
             <a:r>
-              <a:rPr sz="1050" i="1"/>
-              <a:t> — this is a very recent, still-evolving rule, worth watching rather than treating as settled.</a:t>
+              <a:rPr sz="1050" i="1" dirty="0"/>
+              <a:t> — this is a very recent, still-evolving rule, </a:t>
             </a:r>
           </a:p>
         </p:txBody>
@@ -16282,26 +16325,55 @@
           <a:lstStyle/>
           <a:p>
             <a:r>
-              <a:t>From Lecture 8: the NBA controls cost with a salary cap + luxury tax — a price-based tool, with the tax revenue redistributed to compliant teams</a:t>
-            </a:r>
-          </a:p>
-          <a:p>
-            <a:r>
-              <a:t>UEFA’s FFP/SCR controls cost with a break-even / spend-ratio rule — tied to each club’s OWN revenue, not a league-wide fixed number</a:t>
-            </a:r>
-          </a:p>
-          <a:p>
-            <a:r>
+              <a:rPr dirty="0"/>
+              <a:t>From Lecture 8: the NBA controls cost with a salary cap + luxury tax</a:t>
+            </a:r>
+            <a:r>
+              <a:rPr lang="it-IT" dirty="0"/>
+              <a:t>, </a:t>
+            </a:r>
+            <a:r>
+              <a:rPr dirty="0"/>
+              <a:t>a price-based tool, with the tax revenue redistributed to compliant teams</a:t>
+            </a:r>
+          </a:p>
+          <a:p>
+            <a:r>
+              <a:rPr dirty="0"/>
+              <a:t>UEFA’s FFP/SCR controls cost with a break-even / spend-ratio rule</a:t>
+            </a:r>
+            <a:r>
+              <a:rPr lang="it-IT" dirty="0"/>
+              <a:t>, </a:t>
+            </a:r>
+            <a:r>
+              <a:rPr dirty="0"/>
+              <a:t>tied to each club’s OWN revenue, not a league-wide fixed number</a:t>
+            </a:r>
+          </a:p>
+          <a:p>
+            <a:r>
+              <a:rPr dirty="0"/>
               <a:t>Consequence: the NBA’s cap applies (roughly) equally to all 30 teams; UEFA’s SCR lets big-revenue clubs spend far more in absolute terms and still comply</a:t>
             </a:r>
           </a:p>
           <a:p>
             <a:r>
-              <a:t>The NBA’s tax money is redistributed to smaller-market teams (Lecture 8); FFP’s fines mostly just go to UEFA — no redistribution mechanism to help smaller clubs catch up</a:t>
-            </a:r>
-          </a:p>
-          <a:p>
-            <a:r>
+              <a:rPr dirty="0"/>
+              <a:t>The NBA’s tax money is redistributed to smaller-market teams (Lecture 8); FFP’s fines mostly just go to UEFA</a:t>
+            </a:r>
+            <a:r>
+              <a:rPr lang="it-IT" dirty="0"/>
+              <a:t>, </a:t>
+            </a:r>
+            <a:r>
+              <a:rPr dirty="0"/>
+              <a:t> no redistribution mechanism to help smaller clubs catch up</a:t>
+            </a:r>
+          </a:p>
+          <a:p>
+            <a:r>
+              <a:rPr dirty="0"/>
               <a:t>Open question for discussion: could European football adopt something closer to a league-wide cap, given its open promotion/relegation structure (Sloane, Lecture 8) makes a closed-league-style cap harder to design?</a:t>
             </a:r>
           </a:p>
@@ -16369,7 +16441,16 @@
           <a:lstStyle/>
           <a:p>
             <a:r>
-              <a:t>FFP’s break-even rule was built to stop clubs from spending beyond their means — directly targeting the utility-maximization problem from </a:t>
+              <a:rPr dirty="0"/>
+              <a:t>FFP’s break-even rule was built to stop clubs from spending beyond their means</a:t>
+            </a:r>
+            <a:r>
+              <a:rPr lang="it-IT" dirty="0"/>
+              <a:t>, </a:t>
+            </a:r>
+            <a:r>
+              <a:rPr dirty="0"/>
+              <a:t>directly targeting the utility-maximization problem from </a:t>
             </a:r>
             <a:r>
               <a:rPr dirty="0">
@@ -16386,23 +16467,56 @@
           </a:p>
           <a:p>
             <a:r>
+              <a:rPr dirty="0"/>
               <a:t>Enforcement is real but imperfect: City and PSG were sanctioned in 2014, but City’s 2020 ban was overturned on procedural grounds by CAS</a:t>
             </a:r>
           </a:p>
           <a:p>
             <a:r>
-              <a:t>The evidence is mixed: FFP improved measured profitability, but the deeper goals — financial safety and competitive balance — are much less clearly achieved, and some studies find balance got WORSE</a:t>
-            </a:r>
-          </a:p>
-          <a:p>
-            <a:r>
-              <a:t>A revenue-tied rule like FFP/SCR structurally favors clubs that already earn the most — a very different design choice from the NBA’s flatter salary cap</a:t>
-            </a:r>
-          </a:p>
-          <a:p>
-            <a:r>
-              <a:t>The newer Financial Sustainability Regulations (2022+) are still being tested in real time — this is an unfinished story, not a closed one</a:t>
-            </a:r>
+              <a:rPr dirty="0"/>
+              <a:t>The evidence is mixed: FFP improved measured profitability, but the deeper goals</a:t>
+            </a:r>
+            <a:r>
+              <a:rPr lang="it-IT" dirty="0"/>
+              <a:t> (</a:t>
+            </a:r>
+            <a:r>
+              <a:rPr dirty="0"/>
+              <a:t>financial safety and competitive balance</a:t>
+            </a:r>
+            <a:r>
+              <a:rPr lang="it-IT" dirty="0"/>
+              <a:t>)</a:t>
+            </a:r>
+            <a:r>
+              <a:rPr dirty="0"/>
+              <a:t> are much less clearly achieved, and some studies find balance got WORSE</a:t>
+            </a:r>
+          </a:p>
+          <a:p>
+            <a:r>
+              <a:rPr dirty="0"/>
+              <a:t>A revenue-tied rule like FFP/SCR structurally favors clubs that already earn the most</a:t>
+            </a:r>
+            <a:r>
+              <a:rPr lang="it-IT" dirty="0"/>
+              <a:t>, </a:t>
+            </a:r>
+            <a:r>
+              <a:rPr dirty="0"/>
+              <a:t>a very different design choice from the NBA’s flatter salary cap</a:t>
+            </a:r>
+          </a:p>
+          <a:p>
+            <a:r>
+              <a:rPr dirty="0"/>
+              <a:t>The newer Financial Sustainability Regulations (2022+) are still being tested in real time</a:t>
+            </a:r>
+            <a:r>
+              <a:rPr lang="it-IT"/>
+              <a:t>.</a:t>
+            </a:r>
+            <a:endParaRPr dirty="0"/>
           </a:p>
         </p:txBody>
       </p:sp>
@@ -16468,34 +16582,56 @@
           <a:lstStyle/>
           <a:p>
             <a:r>
-              <a:t>From Lecture 8: Sloane (1971) argued football clubs are utility-maximizers, not profit-maximizers — they chase sporting success subject only to a break-even constraint</a:t>
-            </a:r>
-          </a:p>
-          <a:p>
-            <a:r>
+              <a:rPr dirty="0"/>
+              <a:t>From Lecture 8: Sloane (1971) argued football clubs are utility-maximizers, not profit-maximizers</a:t>
+            </a:r>
+            <a:r>
+              <a:rPr lang="it-IT" dirty="0"/>
+              <a:t>, </a:t>
+            </a:r>
+            <a:r>
+              <a:rPr dirty="0"/>
+              <a:t>they chase sporting success subject only to a break-even constraint</a:t>
+            </a:r>
+          </a:p>
+          <a:p>
+            <a:r>
+              <a:rPr dirty="0"/>
               <a:t>When a club overspends and fails financially, it enters administration rather than fully repaying debts or going extinct</a:t>
             </a:r>
           </a:p>
           <a:p>
             <a:r>
+              <a:rPr dirty="0"/>
               <a:t>Two pressure points made this worse over time:</a:t>
             </a:r>
           </a:p>
           <a:p>
             <a:pPr lvl="1"/>
             <a:r>
+              <a:rPr dirty="0"/>
               <a:t>Rising Pay-Per-View / broadcast revenue (more money, less discipline)</a:t>
             </a:r>
           </a:p>
           <a:p>
             <a:pPr lvl="1"/>
             <a:r>
+              <a:rPr dirty="0"/>
               <a:t>The Bosman ruling (Lecture 10) — free agency pushed wages up and gave agents new leverage</a:t>
             </a:r>
           </a:p>
           <a:p>
             <a:r>
-              <a:t>Today: how UEFA actually built a rule to enforce that break-even constraint — and whether it worked</a:t>
+              <a:rPr dirty="0"/>
+              <a:t>Today: how UEFA actually built a rule to enforce that break-even constraint</a:t>
+            </a:r>
+            <a:r>
+              <a:rPr lang="it-IT" dirty="0"/>
+              <a:t>,</a:t>
+            </a:r>
+            <a:r>
+              <a:rPr dirty="0"/>
+              <a:t> and whether it worked</a:t>
             </a:r>
           </a:p>
         </p:txBody>
@@ -16635,7 +16771,8 @@
           <a:lstStyle/>
           <a:p>
             <a:r>
-              <a:t>What Counts — and What Doesn’t</a:t>
+              <a:rPr dirty="0"/>
+              <a:t>What Counts and What Doesn’t</a:t>
             </a:r>
           </a:p>
         </p:txBody>
@@ -16656,41 +16793,56 @@
           <a:lstStyle/>
           <a:p>
             <a:r>
+              <a:rPr dirty="0"/>
               <a:t>Counted (“relevant income/expenses”): gate receipts, broadcasting, sponsorship, commercial revenue, prize money, transfer fees, wages, agents’ fees</a:t>
             </a:r>
           </a:p>
           <a:p>
             <a:r>
+              <a:rPr dirty="0"/>
               <a:t>Deliberately EXCLUDED from the break-even calculation:</a:t>
             </a:r>
           </a:p>
           <a:p>
             <a:pPr lvl="1"/>
             <a:r>
+              <a:rPr dirty="0"/>
               <a:t>Youth academy development</a:t>
             </a:r>
           </a:p>
           <a:p>
             <a:pPr lvl="1"/>
             <a:r>
+              <a:rPr dirty="0"/>
               <a:t>Women’s football</a:t>
             </a:r>
           </a:p>
           <a:p>
             <a:pPr lvl="1"/>
             <a:r>
+              <a:rPr dirty="0"/>
               <a:t>Community development programs</a:t>
             </a:r>
           </a:p>
           <a:p>
             <a:pPr lvl="1"/>
             <a:r>
+              <a:rPr dirty="0"/>
               <a:t>Infrastructure investment (stadium, training ground)</a:t>
             </a:r>
           </a:p>
           <a:p>
             <a:r>
-              <a:t>Why exclude these? To avoid discouraging the kind of long-term investment that’s good for the club and the game — only op-ex-style overspending on wages/transfers is constrained</a:t>
+              <a:rPr dirty="0"/>
+              <a:t>Why exclude these? To avoid discouraging the kind of long-term investment that’s good for the club and the game</a:t>
+            </a:r>
+            <a:r>
+              <a:rPr lang="it-IT" dirty="0"/>
+              <a:t>,</a:t>
+            </a:r>
+            <a:r>
+              <a:rPr dirty="0"/>
+              <a:t> only op-ex-style overspending on wages/transfers is constrained</a:t>
             </a:r>
           </a:p>
         </p:txBody>
@@ -16736,7 +16888,16 @@
           <a:lstStyle/>
           <a:p>
             <a:r>
-              <a:t>Enforcement — the Club Financial Control Body (CFCB)</a:t>
+              <a:rPr dirty="0"/>
+              <a:t>Enforcement</a:t>
+            </a:r>
+            <a:r>
+              <a:rPr lang="it-IT" dirty="0"/>
+              <a:t>:</a:t>
+            </a:r>
+            <a:r>
+              <a:rPr dirty="0"/>
+              <a:t> the Club Financial Control Body (CFCB)</a:t>
             </a:r>
           </a:p>
         </p:txBody>
@@ -16844,7 +17005,16 @@
           <a:lstStyle/>
           <a:p>
             <a:r>
-              <a:t>Real Case — Manchester City &amp; PSG (2014)</a:t>
+              <a:rPr dirty="0"/>
+              <a:t>Real Case</a:t>
+            </a:r>
+            <a:r>
+              <a:rPr lang="it-IT" dirty="0"/>
+              <a:t>:</a:t>
+            </a:r>
+            <a:r>
+              <a:rPr dirty="0"/>
+              <a:t> Manchester City &amp; PSG (2014)</a:t>
             </a:r>
           </a:p>
         </p:txBody>
@@ -16865,26 +17035,39 @@
           <a:lstStyle/>
           <a:p>
             <a:r>
+              <a:rPr dirty="0"/>
               <a:t>First major test of FFP enforcement</a:t>
             </a:r>
           </a:p>
           <a:p>
             <a:r>
-              <a:t>Both clubs fined €60m, with €20m suspended — effectively ≈€40m payable, partly refundable if the clubs stayed compliant for two seasons</a:t>
-            </a:r>
-          </a:p>
-          <a:p>
-            <a:r>
+              <a:rPr dirty="0"/>
+              <a:t>Both clubs fined €60m, with €20m suspended</a:t>
+            </a:r>
+            <a:r>
+              <a:rPr lang="it-IT" dirty="0"/>
+              <a:t>,</a:t>
+            </a:r>
+            <a:r>
+              <a:rPr dirty="0"/>
+              <a:t> effectively ≈€40m payable, partly refundable if the clubs stayed compliant for two seasons</a:t>
+            </a:r>
+          </a:p>
+          <a:p>
+            <a:r>
+              <a:rPr dirty="0"/>
               <a:t>Both capped at a 21-player Champions League squad (instead of the normal 25) for 2014/15</a:t>
             </a:r>
           </a:p>
           <a:p>
             <a:r>
+              <a:rPr dirty="0"/>
               <a:t>Both agreed to limit transfer spending and freeze wage bills at prior-season levels for two seasons</a:t>
             </a:r>
           </a:p>
           <a:p>
             <a:r>
+              <a:rPr dirty="0"/>
               <a:t>UEFA also reserved the right to withhold prize money from European competition</a:t>
             </a:r>
           </a:p>
@@ -16931,7 +17114,16 @@
           <a:lstStyle/>
           <a:p>
             <a:r>
-              <a:t>Real Case — Manchester City’s 2020 CAS Appeal</a:t>
+              <a:rPr dirty="0"/>
+              <a:t>Real Case</a:t>
+            </a:r>
+            <a:r>
+              <a:rPr lang="it-IT" dirty="0"/>
+              <a:t>:</a:t>
+            </a:r>
+            <a:r>
+              <a:rPr dirty="0"/>
+              <a:t> Manchester City’s 2020 CAS Appeal</a:t>
             </a:r>
           </a:p>
         </p:txBody>
@@ -16965,13 +17157,29 @@
           <a:p>
             <a:r>
               <a:rPr dirty="0"/>
-              <a:t>July 2020: CAS partially upheld the appeal — the ban was lifted entirely; the fine was reduced from €30m to €10m</a:t>
-            </a:r>
-          </a:p>
-          <a:p>
+              <a:t>July 2020: CAS partially upheld the appeal</a:t>
+            </a:r>
+            <a:r>
+              <a:rPr lang="it-IT" dirty="0"/>
+              <a:t>,</a:t>
+            </a:r>
             <a:r>
               <a:rPr dirty="0"/>
-              <a:t>CAS found most alleged breaches were either not established or time-barred, but that City had failed to cooperate with investigators — the basis for the reduced (not eliminated) fine</a:t>
+              <a:t> the ban was lifted entirely; the fine was reduced from €30m to €10m</a:t>
+            </a:r>
+          </a:p>
+          <a:p>
+            <a:r>
+              <a:rPr dirty="0"/>
+              <a:t>CAS found most alleged breaches were either not established or time-barred, but that City had failed to cooperate with investigators</a:t>
+            </a:r>
+            <a:r>
+              <a:rPr lang="it-IT" dirty="0"/>
+              <a:t>,</a:t>
+            </a:r>
+            <a:r>
+              <a:rPr dirty="0"/>
+              <a:t> the basis for the reduced (not eliminated) fine</a:t>
             </a:r>
           </a:p>
           <a:p>
@@ -17023,7 +17231,16 @@
           <a:lstStyle/>
           <a:p>
             <a:r>
-              <a:t>Criticism #1 — Does FFP Entrench the Incumbents?</a:t>
+              <a:rPr dirty="0"/>
+              <a:t>Criticism #1</a:t>
+            </a:r>
+            <a:r>
+              <a:rPr lang="it-IT" dirty="0"/>
+              <a:t>: </a:t>
+            </a:r>
+            <a:r>
+              <a:rPr dirty="0"/>
+              <a:t>Does FFP Entrench the Incumbents?</a:t>
             </a:r>
           </a:p>
         </p:txBody>
@@ -17051,7 +17268,15 @@
           <a:p>
             <a:r>
               <a:rPr dirty="0"/>
-              <a:t>But clubs don’t start with equal revenue — the biggest clubs already earn the most from broadcasting, sponsorship and prize money</a:t>
+              <a:t>But clubs don’t start with equal revenue</a:t>
+            </a:r>
+            <a:r>
+              <a:rPr lang="it-IT" dirty="0"/>
+              <a:t>,</a:t>
+            </a:r>
+            <a:r>
+              <a:rPr dirty="0"/>
+              <a:t> the biggest clubs already earn the most from broadcasting, sponsorship and prize money</a:t>
             </a:r>
           </a:p>
           <a:p>
@@ -17081,7 +17306,15 @@
           <a:p>
             <a:r>
               <a:rPr dirty="0"/>
-              <a:t>Empirical studies (Spain, Germany, France) report fewer distinct league-title winners after FFP’s introduction — the opposite of a competitive-balance goal</a:t>
+              <a:t>Empirical studies (Spain, Germany, France) report fewer distinct league-title winners after FFP’s introduction</a:t>
+            </a:r>
+            <a:r>
+              <a:rPr lang="it-IT" dirty="0"/>
+              <a:t>: </a:t>
+            </a:r>
+            <a:r>
+              <a:rPr dirty="0"/>
+              <a:t>the opposite of a competitive-balance goal</a:t>
             </a:r>
           </a:p>
         </p:txBody>
@@ -17127,7 +17360,16 @@
           <a:lstStyle/>
           <a:p>
             <a:r>
-              <a:t>Criticism #2 — Limiting an Owner’s Own Money</a:t>
+              <a:rPr dirty="0"/>
+              <a:t>Criticism #2</a:t>
+            </a:r>
+            <a:r>
+              <a:rPr lang="it-IT" dirty="0"/>
+              <a:t>: </a:t>
+            </a:r>
+            <a:r>
+              <a:rPr dirty="0"/>
+              <a:t>Limiting an Owner’s Own Money</a:t>
             </a:r>
           </a:p>
         </p:txBody>
@@ -17148,21 +17390,41 @@
           <a:lstStyle/>
           <a:p>
             <a:r>
-              <a:t>In an ordinary business, an owner can inject as much of their own capital as they like — no regulator stops a founder from funding losses out of pocket</a:t>
-            </a:r>
-          </a:p>
-          <a:p>
-            <a:r>
+              <a:rPr dirty="0"/>
+              <a:t>In an ordinary business, an owner can inject as much of their own capital as they like</a:t>
+            </a:r>
+            <a:r>
+              <a:rPr lang="it-IT" dirty="0"/>
+              <a:t>,</a:t>
+            </a:r>
+            <a:r>
+              <a:rPr dirty="0"/>
+              <a:t> no regulator stops a founder from funding losses out of pocket</a:t>
+            </a:r>
+          </a:p>
+          <a:p>
+            <a:r>
+              <a:rPr dirty="0"/>
               <a:t>FFP caps this directly: owner equity injections beyond the allowed deviation (€30m/3 years, or €5m without owner funding) don’t exempt a club from breach</a:t>
             </a:r>
           </a:p>
           <a:p>
             <a:r>
-              <a:t>The justification: unlimited owner subsidy would let a wealthy benefactor simply buy sporting success regardless of the club’s own economics — undermining both solvency discipline and competitive balance</a:t>
-            </a:r>
-          </a:p>
-          <a:p>
-            <a:r>
+              <a:rPr dirty="0"/>
+              <a:t>The justification: unlimited owner subsidy would let a wealthy benefactor simply buy sporting success regardless of the club’s own economics</a:t>
+            </a:r>
+            <a:r>
+              <a:rPr lang="it-IT" dirty="0"/>
+              <a:t>, </a:t>
+            </a:r>
+            <a:r>
+              <a:rPr dirty="0"/>
+              <a:t>undermining both solvency discipline and competitive balance</a:t>
+            </a:r>
+          </a:p>
+          <a:p>
+            <a:r>
+              <a:rPr dirty="0"/>
               <a:t>The tension: is it fair to restrict what an owner does with their own money, in a way no other industry faces?</a:t>
             </a:r>
           </a:p>
@@ -19126,18 +19388,18 @@
 </file>
 
 <file path=customXml/item2.xml><?xml version="1.0" encoding="utf-8"?>
-<p:properties xmlns:p="http://schemas.microsoft.com/office/2006/metadata/properties" xmlns:xsi="http://www.w3.org/2001/XMLSchema-instance" xmlns:pc="http://schemas.microsoft.com/office/infopath/2007/PartnerControls">
-  <documentManagement/>
-</p:properties>
-</file>
-
-<file path=customXml/item3.xml><?xml version="1.0" encoding="utf-8"?>
 <?mso-contentType ?>
 <FormTemplates xmlns="http://schemas.microsoft.com/sharepoint/v3/contenttype/forms">
   <Display>DocumentLibraryForm</Display>
   <Edit>DocumentLibraryForm</Edit>
   <New>DocumentLibraryForm</New>
 </FormTemplates>
+</file>
+
+<file path=customXml/item3.xml><?xml version="1.0" encoding="utf-8"?>
+<p:properties xmlns:p="http://schemas.microsoft.com/office/2006/metadata/properties" xmlns:xsi="http://www.w3.org/2001/XMLSchema-instance" xmlns:pc="http://schemas.microsoft.com/office/infopath/2007/PartnerControls">
+  <documentManagement/>
+</p:properties>
 </file>
 
 <file path=customXml/itemProps1.xml><?xml version="1.0" encoding="utf-8"?>
@@ -19157,6 +19419,14 @@
 </file>
 
 <file path=customXml/itemProps2.xml><?xml version="1.0" encoding="utf-8"?>
+<ds:datastoreItem xmlns:ds="http://schemas.openxmlformats.org/officeDocument/2006/customXml" ds:itemID="{27479CE2-CFF2-495B-B6E0-2F66375CDBBB}">
+  <ds:schemaRefs>
+    <ds:schemaRef ds:uri="http://schemas.microsoft.com/sharepoint/v3/contenttype/forms"/>
+  </ds:schemaRefs>
+</ds:datastoreItem>
+</file>
+
+<file path=customXml/itemProps3.xml><?xml version="1.0" encoding="utf-8"?>
 <ds:datastoreItem xmlns:ds="http://schemas.openxmlformats.org/officeDocument/2006/customXml" ds:itemID="{3CAC7484-FE6E-40E6-83CA-83D55D847BA8}">
   <ds:schemaRefs>
     <ds:schemaRef ds:uri="http://schemas.microsoft.com/office/2006/documentManagement/types"/>
@@ -19169,12 +19439,4 @@
     <ds:schemaRef ds:uri="http://purl.org/dc/elements/1.1/"/>
   </ds:schemaRefs>
 </ds:datastoreItem>
-</file>
-
-<file path=customXml/itemProps3.xml><?xml version="1.0" encoding="utf-8"?>
-<ds:datastoreItem xmlns:ds="http://schemas.openxmlformats.org/officeDocument/2006/customXml" ds:itemID="{27479CE2-CFF2-495B-B6E0-2F66375CDBBB}">
-  <ds:schemaRefs>
-    <ds:schemaRef ds:uri="http://schemas.microsoft.com/sharepoint/v3/contenttype/forms"/>
-  </ds:schemaRefs>
-</ds:datastoreItem>
 </file>
--- a/lectures/L11.pptx
+++ b/lectures/L11.pptx
@@ -9,10 +9,10 @@
     <p:sldMasterId id="2147483712" r:id="rId8"/>
   </p:sldMasterIdLst>
   <p:notesMasterIdLst>
-    <p:notesMasterId r:id="rId23"/>
+    <p:notesMasterId r:id="rId27"/>
   </p:notesMasterIdLst>
   <p:handoutMasterIdLst>
-    <p:handoutMasterId r:id="rId24"/>
+    <p:handoutMasterId r:id="rId28"/>
   </p:handoutMasterIdLst>
   <p:sldIdLst>
     <p:sldId id="280" r:id="rId9"/>
@@ -22,13 +22,17 @@
     <p:sldId id="284" r:id="rId13"/>
     <p:sldId id="285" r:id="rId14"/>
     <p:sldId id="286" r:id="rId15"/>
-    <p:sldId id="287" r:id="rId16"/>
-    <p:sldId id="288" r:id="rId17"/>
-    <p:sldId id="289" r:id="rId18"/>
-    <p:sldId id="290" r:id="rId19"/>
-    <p:sldId id="291" r:id="rId20"/>
-    <p:sldId id="292" r:id="rId21"/>
-    <p:sldId id="293" r:id="rId22"/>
+    <p:sldId id="296" r:id="rId16"/>
+    <p:sldId id="297" r:id="rId17"/>
+    <p:sldId id="294" r:id="rId18"/>
+    <p:sldId id="295" r:id="rId19"/>
+    <p:sldId id="287" r:id="rId20"/>
+    <p:sldId id="288" r:id="rId21"/>
+    <p:sldId id="289" r:id="rId22"/>
+    <p:sldId id="290" r:id="rId23"/>
+    <p:sldId id="291" r:id="rId24"/>
+    <p:sldId id="292" r:id="rId25"/>
+    <p:sldId id="293" r:id="rId26"/>
   </p:sldIdLst>
   <p:sldSz cx="9144000" cy="5715000" type="screen16x10"/>
   <p:notesSz cx="6858000" cy="9144000"/>
@@ -139,6 +143,10 @@
             <p14:sldId id="284"/>
             <p14:sldId id="285"/>
             <p14:sldId id="286"/>
+            <p14:sldId id="296"/>
+            <p14:sldId id="297"/>
+            <p14:sldId id="294"/>
+            <p14:sldId id="295"/>
             <p14:sldId id="287"/>
             <p14:sldId id="288"/>
             <p14:sldId id="289"/>
@@ -7505,7 +7513,7 @@
           <a:p>
             <a:fld id="{2A8A781A-1859-4C85-BF75-12C8100C455E}" type="datetimeFigureOut">
               <a:rPr lang="nb-NO" smtClean="0"/>
-              <a:t>28.09.2026</a:t>
+              <a:t>19.10.2026</a:t>
             </a:fld>
             <a:endParaRPr lang="nb-NO" dirty="0"/>
           </a:p>
@@ -7682,7 +7690,7 @@
           <a:p>
             <a:fld id="{8B442447-825E-F44A-AE66-BBD0FC2F1FF6}" type="datetimeFigureOut">
               <a:rPr lang="nb-NO" smtClean="0"/>
-              <a:t>28.09.2026</a:t>
+              <a:t>19.10.2026</a:t>
             </a:fld>
             <a:endParaRPr lang="nb-NO" dirty="0"/>
           </a:p>
@@ -15933,7 +15941,8 @@
           <a:lstStyle/>
           <a:p>
             <a:r>
-              <a:t>What Does the Evidence Actually Show?</a:t>
+              <a:rPr lang="en-GB" dirty="0"/>
+              <a:t>Real Case: Burnley v Everton (2026)</a:t>
             </a:r>
           </a:p>
         </p:txBody>
@@ -15950,77 +15959,52 @@
         </p:nvSpPr>
         <p:spPr/>
         <p:txBody>
-          <a:bodyPr wrap="square"/>
+          <a:bodyPr wrap="square">
+            <a:normAutofit/>
+          </a:bodyPr>
           <a:lstStyle/>
           <a:p>
             <a:r>
-              <a:rPr dirty="0">
-                <a:hlinkClick r:id="rId2">
-                  <a:extLst>
-                    <a:ext uri="{A12FA001-AC4F-418D-AE19-62706E023703}">
-                      <ahyp:hlinkClr xmlns:ahyp="http://schemas.microsoft.com/office/drawing/2018/hyperlinkcolor" val="tx"/>
-                    </a:ext>
-                  </a:extLst>
-                </a:hlinkClick>
-              </a:rPr>
-              <a:t>Alabi &amp; Urquhart (2024)</a:t>
-            </a:r>
-            <a:r>
-              <a:rPr dirty="0"/>
-              <a:t>: a study of the English Premier League (2011–2019) found FFP improved measured profitability</a:t>
-            </a:r>
-            <a:r>
-              <a:rPr lang="it-IT" dirty="0"/>
-              <a:t>, </a:t>
-            </a:r>
-            <a:r>
-              <a:rPr dirty="0"/>
-              <a:t>clubs managed income and expenses more carefully</a:t>
-            </a:r>
-          </a:p>
-          <a:p>
-            <a:r>
-              <a:rPr dirty="0"/>
-              <a:t>But it did NOT clearly improve underlying financial sustainability</a:t>
+              <a:rPr lang="en-GB" dirty="0"/>
+              <a:t>Everton breached the Premier League’s PSR loss limit (£105m over 3 years) by £19.5m (2019/20–2021/22) and were deducted 6 points</a:t>
+            </a:r>
+          </a:p>
+          <a:p>
+            <a:r>
+              <a:rPr lang="en-GB" dirty="0"/>
+              <a:t>2021/22: Everton finished 16th (39 pts), Burnley 18th (35 pts) and were relegated</a:t>
+            </a:r>
+          </a:p>
+          <a:p>
+            <a:r>
+              <a:rPr lang="en-GB" dirty="0"/>
+              <a:t>Burnley sued under Rule W, which lets a club claim damages for another club’s PSR breach</a:t>
             </a:r>
           </a:p>
           <a:p>
             <a:pPr lvl="1"/>
             <a:r>
-              <a:rPr dirty="0"/>
-              <a:t>Clubs instead became more interconnected through installment-payment debt owed to each other (e.g. transfer fees paid in installments)</a:t>
-            </a:r>
-            <a:r>
-              <a:rPr lang="it-IT" dirty="0"/>
-              <a:t>, </a:t>
-            </a:r>
-            <a:r>
-              <a:rPr dirty="0"/>
-              <a:t> a new kind of interdependency risk, not necessarily less risk overall</a:t>
-            </a:r>
-          </a:p>
-          <a:p>
-            <a:r>
-              <a:rPr dirty="0">
-                <a:hlinkClick r:id="rId3">
-                  <a:extLst>
-                    <a:ext uri="{A12FA001-AC4F-418D-AE19-62706E023703}">
-                      <ahyp:hlinkClr xmlns:ahyp="http://schemas.microsoft.com/office/drawing/2018/hyperlinkcolor" val="tx"/>
-                    </a:ext>
-                  </a:extLst>
-                </a:hlinkClick>
-              </a:rPr>
-              <a:t>Gallagher &amp; Quinn</a:t>
-            </a:r>
-            <a:r>
-              <a:rPr dirty="0"/>
-              <a:t>: the break-even rule reduced average club efficiency and shifted club priorities toward financial targets over sporting ones</a:t>
-            </a:r>
-          </a:p>
-          <a:p>
-            <a:r>
-              <a:rPr dirty="0"/>
-              <a:t>Takeaway: FFP achieved some of its accounting goals, but the deeper claims (financial safety, competitive balance) are much less clearly supported</a:t>
+              <a:rPr lang="en-GB" dirty="0"/>
+              <a:t>Argument: without the overspend, Everton would have gone down instead of Burnley</a:t>
+            </a:r>
+          </a:p>
+          <a:p>
+            <a:r>
+              <a:rPr lang="en-GB" dirty="0"/>
+              <a:t>June 2026: the commission accepted Burnley’s experts: a 51–70% chance Everton would have gone down instead → “more likely than not” → full damages</a:t>
+            </a:r>
+          </a:p>
+          <a:p>
+            <a:pPr lvl="1"/>
+            <a:r>
+              <a:rPr lang="en-GB" dirty="0"/>
+              <a:t>£26m lost profit + £9.1m interest ≈ £35m (Everton have appealed)</a:t>
+            </a:r>
+          </a:p>
+          <a:p>
+            <a:r>
+              <a:rPr lang="en-GB" dirty="0"/>
+              <a:t>Something new: FFP-type rules now create claims between clubs, not just sanctions from the league</a:t>
             </a:r>
           </a:p>
         </p:txBody>
@@ -16066,16 +16050,142 @@
           <a:lstStyle/>
           <a:p>
             <a:r>
+              <a:rPr lang="en-GB" dirty="0"/>
+              <a:t>How Much Harm Did Everton Really Cause?</a:t>
+            </a:r>
+          </a:p>
+        </p:txBody>
+      </p:sp>
+      <p:sp>
+        <p:nvSpPr>
+          <p:cNvPr id="3" name="Content Placeholder 2"/>
+          <p:cNvSpPr>
+            <a:spLocks noGrp="1"/>
+          </p:cNvSpPr>
+          <p:nvPr>
+            <p:ph idx="1"/>
+          </p:nvPr>
+        </p:nvSpPr>
+        <p:spPr/>
+        <p:txBody>
+          <a:bodyPr wrap="square">
+            <a:normAutofit/>
+          </a:bodyPr>
+          <a:lstStyle/>
+          <a:p>
+            <a:r>
+              <a:rPr lang="en-GB" dirty="0"/>
+              <a:t>Szymanski, Reade, Peeters &amp; Singleton (</a:t>
+            </a:r>
+            <a:r>
+              <a:rPr lang="en-GB" dirty="0">
+                <a:hlinkClick r:id="rId2">
+                  <a:extLst>
+                    <a:ext uri="{A12FA001-AC4F-418D-AE19-62706E023703}">
+                      <ahyp:hlinkClr xmlns:ahyp="http://schemas.microsoft.com/office/drawing/2018/hyperlinkcolor" val="tx"/>
+                    </a:ext>
+                  </a:extLst>
+                </a:hlinkClick>
+              </a:rPr>
+              <a:t>ROSES seminar, 2026</a:t>
+            </a:r>
+            <a:r>
+              <a:rPr lang="en-GB" dirty="0"/>
+              <a:t>) simulated the 2021/22 season 100,000 times, with and without the £19.5m overspend</a:t>
+            </a:r>
+          </a:p>
+          <a:p>
+            <a:pPr lvl="1"/>
+            <a:r>
+              <a:rPr lang="en-GB" dirty="0"/>
+              <a:t>Everton lose ≈2.5 points without it, not enough to close the 4-point gap</a:t>
+            </a:r>
+          </a:p>
+          <a:p>
+            <a:pPr lvl="1"/>
+            <a:r>
+              <a:rPr lang="en-GB" dirty="0"/>
+              <a:t>Burnley’s relegation probability: 21.9% → 21.4%</a:t>
+            </a:r>
+          </a:p>
+          <a:p>
+            <a:r>
+              <a:rPr lang="en-GB" dirty="0"/>
+              <a:t>English law is all-or-nothing: if harm is “more likely than not”, the claimant gets 100%</a:t>
+            </a:r>
+          </a:p>
+          <a:p>
+            <a:r>
+              <a:rPr lang="en-GB" dirty="0"/>
+              <a:t>Their proposal, “loss of chance”: damages = change in probability × loss</a:t>
+            </a:r>
+          </a:p>
+          <a:p>
+            <a:pPr lvl="1"/>
+            <a:r>
+              <a:rPr lang="en-GB" dirty="0"/>
+              <a:t>0.5 pp × £35m ≈ £175,000, not £35m</a:t>
+            </a:r>
+          </a:p>
+          <a:p>
+            <a:r>
+              <a:rPr lang="en-GB" dirty="0"/>
+              <a:t>Punishment (points deductions) deters clubs; damages should only compensate the actual harm</a:t>
+            </a:r>
+          </a:p>
+        </p:txBody>
+      </p:sp>
+    </p:spTree>
+  </p:cSld>
+  <p:clrMapOvr>
+    <a:masterClrMapping/>
+  </p:clrMapOvr>
+</p:sld>
+</file>
+
+<file path=ppt/slides/slide12.xml><?xml version="1.0" encoding="utf-8"?>
+<p:sld xmlns:a="http://schemas.openxmlformats.org/drawingml/2006/main" xmlns:r="http://schemas.openxmlformats.org/officeDocument/2006/relationships" xmlns:p="http://schemas.openxmlformats.org/presentationml/2006/main">
+  <p:cSld>
+    <p:spTree>
+      <p:nvGrpSpPr>
+        <p:cNvPr id="1" name=""/>
+        <p:cNvGrpSpPr/>
+        <p:nvPr/>
+      </p:nvGrpSpPr>
+      <p:grpSpPr>
+        <a:xfrm>
+          <a:off x="0" y="0"/>
+          <a:ext cx="0" cy="0"/>
+          <a:chOff x="0" y="0"/>
+          <a:chExt cx="0" cy="0"/>
+        </a:xfrm>
+      </p:grpSpPr>
+      <p:sp>
+        <p:nvSpPr>
+          <p:cNvPr id="2" name="Title 1"/>
+          <p:cNvSpPr>
+            <a:spLocks noGrp="1"/>
+          </p:cNvSpPr>
+          <p:nvPr>
+            <p:ph type="title"/>
+          </p:nvPr>
+        </p:nvSpPr>
+        <p:spPr/>
+        <p:txBody>
+          <a:bodyPr/>
+          <a:lstStyle/>
+          <a:p>
+            <a:r>
               <a:rPr dirty="0"/>
-              <a:t>FFP 2.0</a:t>
+              <a:t>Criticism #1</a:t>
             </a:r>
             <a:r>
               <a:rPr lang="it-IT" dirty="0"/>
-              <a:t>:</a:t>
+              <a:t>: </a:t>
             </a:r>
             <a:r>
               <a:rPr dirty="0"/>
-              <a:t> The Financial Sustainability Regulations (2022+)</a:t>
+              <a:t>Does FFP Entrench the Incumbents?</a:t>
             </a:r>
           </a:p>
         </p:txBody>
@@ -16097,6 +16207,379 @@
           <a:p>
             <a:r>
               <a:rPr dirty="0"/>
+              <a:t>A break-even rule caps how much a club can spend RELATIVE TO its own revenue</a:t>
+            </a:r>
+          </a:p>
+          <a:p>
+            <a:r>
+              <a:rPr dirty="0"/>
+              <a:t>But clubs don’t start with equal revenue</a:t>
+            </a:r>
+            <a:r>
+              <a:rPr lang="it-IT" dirty="0"/>
+              <a:t>,</a:t>
+            </a:r>
+            <a:r>
+              <a:rPr dirty="0"/>
+              <a:t> the biggest clubs already earn the most from broadcasting, sponsorship and prize money</a:t>
+            </a:r>
+          </a:p>
+          <a:p>
+            <a:r>
+              <a:rPr dirty="0"/>
+              <a:t>Result: rich clubs can spend more and still comply; ambitious smaller clubs are constrained exactly when they’d need to spend heavily to break into the elite</a:t>
+            </a:r>
+          </a:p>
+          <a:p>
+            <a:r>
+              <a:rPr dirty="0">
+                <a:hlinkClick r:id="rId2">
+                  <a:extLst>
+                    <a:ext uri="{A12FA001-AC4F-418D-AE19-62706E023703}">
+                      <ahyp:hlinkClr xmlns:ahyp="http://schemas.microsoft.com/office/drawing/2018/hyperlinkcolor" val="tx"/>
+                    </a:ext>
+                  </a:extLst>
+                </a:hlinkClick>
+              </a:rPr>
+              <a:t>Peeters &amp; Szymanski</a:t>
+            </a:r>
+            <a:r>
+              <a:rPr dirty="0"/>
+              <a:t>: FFP raises club profitability mainly by suppressing wage spending, but cements the competitive advantage of incumbent top clubs</a:t>
+            </a:r>
+          </a:p>
+          <a:p>
+            <a:r>
+              <a:rPr dirty="0"/>
+              <a:t>Empirical studies (Spain, Germany, France) report fewer distinct league-title winners after FFP’s introduction</a:t>
+            </a:r>
+            <a:r>
+              <a:rPr lang="it-IT" dirty="0"/>
+              <a:t>: </a:t>
+            </a:r>
+            <a:r>
+              <a:rPr dirty="0"/>
+              <a:t>the opposite of a competitive-balance goal</a:t>
+            </a:r>
+          </a:p>
+        </p:txBody>
+      </p:sp>
+    </p:spTree>
+  </p:cSld>
+  <p:clrMapOvr>
+    <a:masterClrMapping/>
+  </p:clrMapOvr>
+</p:sld>
+</file>
+
+<file path=ppt/slides/slide13.xml><?xml version="1.0" encoding="utf-8"?>
+<p:sld xmlns:a="http://schemas.openxmlformats.org/drawingml/2006/main" xmlns:r="http://schemas.openxmlformats.org/officeDocument/2006/relationships" xmlns:p="http://schemas.openxmlformats.org/presentationml/2006/main">
+  <p:cSld>
+    <p:spTree>
+      <p:nvGrpSpPr>
+        <p:cNvPr id="1" name=""/>
+        <p:cNvGrpSpPr/>
+        <p:nvPr/>
+      </p:nvGrpSpPr>
+      <p:grpSpPr>
+        <a:xfrm>
+          <a:off x="0" y="0"/>
+          <a:ext cx="0" cy="0"/>
+          <a:chOff x="0" y="0"/>
+          <a:chExt cx="0" cy="0"/>
+        </a:xfrm>
+      </p:grpSpPr>
+      <p:sp>
+        <p:nvSpPr>
+          <p:cNvPr id="2" name="Title 1"/>
+          <p:cNvSpPr>
+            <a:spLocks noGrp="1"/>
+          </p:cNvSpPr>
+          <p:nvPr>
+            <p:ph type="title"/>
+          </p:nvPr>
+        </p:nvSpPr>
+        <p:spPr/>
+        <p:txBody>
+          <a:bodyPr/>
+          <a:lstStyle/>
+          <a:p>
+            <a:r>
+              <a:rPr dirty="0"/>
+              <a:t>Criticism #2</a:t>
+            </a:r>
+            <a:r>
+              <a:rPr lang="it-IT" dirty="0"/>
+              <a:t>: </a:t>
+            </a:r>
+            <a:r>
+              <a:rPr dirty="0"/>
+              <a:t>Limiting an Owner’s Own Money</a:t>
+            </a:r>
+          </a:p>
+        </p:txBody>
+      </p:sp>
+      <p:sp>
+        <p:nvSpPr>
+          <p:cNvPr id="3" name="Content Placeholder 2"/>
+          <p:cNvSpPr>
+            <a:spLocks noGrp="1"/>
+          </p:cNvSpPr>
+          <p:nvPr>
+            <p:ph idx="1"/>
+          </p:nvPr>
+        </p:nvSpPr>
+        <p:spPr/>
+        <p:txBody>
+          <a:bodyPr wrap="square"/>
+          <a:lstStyle/>
+          <a:p>
+            <a:r>
+              <a:rPr dirty="0"/>
+              <a:t>In an ordinary business, an owner can inject as much of their own capital as they like</a:t>
+            </a:r>
+            <a:r>
+              <a:rPr lang="it-IT" dirty="0"/>
+              <a:t>,</a:t>
+            </a:r>
+            <a:r>
+              <a:rPr dirty="0"/>
+              <a:t> no regulator stops a founder from funding losses out of pocket</a:t>
+            </a:r>
+          </a:p>
+          <a:p>
+            <a:r>
+              <a:rPr dirty="0"/>
+              <a:t>FFP caps this directly: owner equity injections beyond the allowed deviation (€30m/3 years, or €5m without owner funding) don’t exempt a club from breach</a:t>
+            </a:r>
+          </a:p>
+          <a:p>
+            <a:r>
+              <a:rPr dirty="0"/>
+              <a:t>The justification: unlimited owner subsidy would let a wealthy benefactor simply buy sporting success regardless of the club’s own economics</a:t>
+            </a:r>
+            <a:r>
+              <a:rPr lang="it-IT" dirty="0"/>
+              <a:t>, </a:t>
+            </a:r>
+            <a:r>
+              <a:rPr dirty="0"/>
+              <a:t>undermining both solvency discipline and competitive balance</a:t>
+            </a:r>
+          </a:p>
+          <a:p>
+            <a:r>
+              <a:rPr dirty="0"/>
+              <a:t>The tension: is it fair to restrict what an owner does with their own money, in a way no other industry faces?</a:t>
+            </a:r>
+          </a:p>
+        </p:txBody>
+      </p:sp>
+    </p:spTree>
+  </p:cSld>
+  <p:clrMapOvr>
+    <a:masterClrMapping/>
+  </p:clrMapOvr>
+</p:sld>
+</file>
+
+<file path=ppt/slides/slide14.xml><?xml version="1.0" encoding="utf-8"?>
+<p:sld xmlns:a="http://schemas.openxmlformats.org/drawingml/2006/main" xmlns:r="http://schemas.openxmlformats.org/officeDocument/2006/relationships" xmlns:p="http://schemas.openxmlformats.org/presentationml/2006/main">
+  <p:cSld>
+    <p:spTree>
+      <p:nvGrpSpPr>
+        <p:cNvPr id="1" name=""/>
+        <p:cNvGrpSpPr/>
+        <p:nvPr/>
+      </p:nvGrpSpPr>
+      <p:grpSpPr>
+        <a:xfrm>
+          <a:off x="0" y="0"/>
+          <a:ext cx="0" cy="0"/>
+          <a:chOff x="0" y="0"/>
+          <a:chExt cx="0" cy="0"/>
+        </a:xfrm>
+      </p:grpSpPr>
+      <p:sp>
+        <p:nvSpPr>
+          <p:cNvPr id="2" name="Title 1"/>
+          <p:cNvSpPr>
+            <a:spLocks noGrp="1"/>
+          </p:cNvSpPr>
+          <p:nvPr>
+            <p:ph type="title"/>
+          </p:nvPr>
+        </p:nvSpPr>
+        <p:spPr/>
+        <p:txBody>
+          <a:bodyPr/>
+          <a:lstStyle/>
+          <a:p>
+            <a:r>
+              <a:t>What Does the Evidence Actually Show?</a:t>
+            </a:r>
+          </a:p>
+        </p:txBody>
+      </p:sp>
+      <p:sp>
+        <p:nvSpPr>
+          <p:cNvPr id="3" name="Content Placeholder 2"/>
+          <p:cNvSpPr>
+            <a:spLocks noGrp="1"/>
+          </p:cNvSpPr>
+          <p:nvPr>
+            <p:ph idx="1"/>
+          </p:nvPr>
+        </p:nvSpPr>
+        <p:spPr/>
+        <p:txBody>
+          <a:bodyPr wrap="square"/>
+          <a:lstStyle/>
+          <a:p>
+            <a:r>
+              <a:rPr dirty="0">
+                <a:hlinkClick r:id="rId2">
+                  <a:extLst>
+                    <a:ext uri="{A12FA001-AC4F-418D-AE19-62706E023703}">
+                      <ahyp:hlinkClr xmlns:ahyp="http://schemas.microsoft.com/office/drawing/2018/hyperlinkcolor" val="tx"/>
+                    </a:ext>
+                  </a:extLst>
+                </a:hlinkClick>
+              </a:rPr>
+              <a:t>Alabi &amp; Urquhart (2024)</a:t>
+            </a:r>
+            <a:r>
+              <a:rPr dirty="0"/>
+              <a:t>: a study of the English Premier League (2011–2019) found FFP improved measured profitability</a:t>
+            </a:r>
+            <a:r>
+              <a:rPr lang="it-IT" dirty="0"/>
+              <a:t>, </a:t>
+            </a:r>
+            <a:r>
+              <a:rPr dirty="0"/>
+              <a:t>clubs managed income and expenses more carefully</a:t>
+            </a:r>
+          </a:p>
+          <a:p>
+            <a:r>
+              <a:rPr dirty="0"/>
+              <a:t>But it did NOT clearly improve underlying financial sustainability</a:t>
+            </a:r>
+          </a:p>
+          <a:p>
+            <a:pPr lvl="1"/>
+            <a:r>
+              <a:rPr dirty="0"/>
+              <a:t>Clubs instead became more interconnected through installment-payment debt owed to each other (e.g. transfer fees paid in installments)</a:t>
+            </a:r>
+            <a:r>
+              <a:rPr lang="it-IT" dirty="0"/>
+              <a:t>, </a:t>
+            </a:r>
+            <a:r>
+              <a:rPr dirty="0"/>
+              <a:t> a new kind of interdependency risk, not necessarily less risk overall</a:t>
+            </a:r>
+          </a:p>
+          <a:p>
+            <a:r>
+              <a:rPr dirty="0">
+                <a:hlinkClick r:id="rId3">
+                  <a:extLst>
+                    <a:ext uri="{A12FA001-AC4F-418D-AE19-62706E023703}">
+                      <ahyp:hlinkClr xmlns:ahyp="http://schemas.microsoft.com/office/drawing/2018/hyperlinkcolor" val="tx"/>
+                    </a:ext>
+                  </a:extLst>
+                </a:hlinkClick>
+              </a:rPr>
+              <a:t>Gallagher &amp; Quinn</a:t>
+            </a:r>
+            <a:r>
+              <a:rPr dirty="0"/>
+              <a:t>: the break-even rule reduced average club efficiency and shifted club priorities toward financial targets over sporting ones</a:t>
+            </a:r>
+          </a:p>
+          <a:p>
+            <a:r>
+              <a:rPr dirty="0"/>
+              <a:t>Takeaway: FFP achieved some of its accounting goals, but the deeper claims (financial safety, competitive balance) are much less clearly supported</a:t>
+            </a:r>
+          </a:p>
+        </p:txBody>
+      </p:sp>
+    </p:spTree>
+  </p:cSld>
+  <p:clrMapOvr>
+    <a:masterClrMapping/>
+  </p:clrMapOvr>
+</p:sld>
+</file>
+
+<file path=ppt/slides/slide15.xml><?xml version="1.0" encoding="utf-8"?>
+<p:sld xmlns:a="http://schemas.openxmlformats.org/drawingml/2006/main" xmlns:r="http://schemas.openxmlformats.org/officeDocument/2006/relationships" xmlns:p="http://schemas.openxmlformats.org/presentationml/2006/main">
+  <p:cSld>
+    <p:spTree>
+      <p:nvGrpSpPr>
+        <p:cNvPr id="1" name=""/>
+        <p:cNvGrpSpPr/>
+        <p:nvPr/>
+      </p:nvGrpSpPr>
+      <p:grpSpPr>
+        <a:xfrm>
+          <a:off x="0" y="0"/>
+          <a:ext cx="0" cy="0"/>
+          <a:chOff x="0" y="0"/>
+          <a:chExt cx="0" cy="0"/>
+        </a:xfrm>
+      </p:grpSpPr>
+      <p:sp>
+        <p:nvSpPr>
+          <p:cNvPr id="2" name="Title 1"/>
+          <p:cNvSpPr>
+            <a:spLocks noGrp="1"/>
+          </p:cNvSpPr>
+          <p:nvPr>
+            <p:ph type="title"/>
+          </p:nvPr>
+        </p:nvSpPr>
+        <p:spPr/>
+        <p:txBody>
+          <a:bodyPr/>
+          <a:lstStyle/>
+          <a:p>
+            <a:r>
+              <a:rPr dirty="0"/>
+              <a:t>FFP 2.0</a:t>
+            </a:r>
+            <a:r>
+              <a:rPr lang="it-IT" dirty="0"/>
+              <a:t>:</a:t>
+            </a:r>
+            <a:r>
+              <a:rPr dirty="0"/>
+              <a:t> The Financial Sustainability Regulations (2022+)</a:t>
+            </a:r>
+          </a:p>
+        </p:txBody>
+      </p:sp>
+      <p:sp>
+        <p:nvSpPr>
+          <p:cNvPr id="3" name="Content Placeholder 2"/>
+          <p:cNvSpPr>
+            <a:spLocks noGrp="1"/>
+          </p:cNvSpPr>
+          <p:nvPr>
+            <p:ph idx="1"/>
+          </p:nvPr>
+        </p:nvSpPr>
+        <p:spPr/>
+        <p:txBody>
+          <a:bodyPr wrap="square"/>
+          <a:lstStyle/>
+          <a:p>
+            <a:r>
+              <a:rPr dirty="0"/>
               <a:t>Approved April 2022, phased in from the 2022/23 season, replacing the old break-even-only approach (</a:t>
             </a:r>
             <a:r>
@@ -16153,7 +16636,7 @@
 </p:sld>
 </file>
 
-<file path=ppt/slides/slide12.xml><?xml version="1.0" encoding="utf-8"?>
+<file path=ppt/slides/slide16.xml><?xml version="1.0" encoding="utf-8"?>
 <p:sld xmlns:a="http://schemas.openxmlformats.org/drawingml/2006/main" xmlns:r="http://schemas.openxmlformats.org/officeDocument/2006/relationships" xmlns:p="http://schemas.openxmlformats.org/presentationml/2006/main">
   <p:cSld>
     <p:spTree>
@@ -16269,7 +16752,7 @@
 </p:sld>
 </file>
 
-<file path=ppt/slides/slide13.xml><?xml version="1.0" encoding="utf-8"?>
+<file path=ppt/slides/slide17.xml><?xml version="1.0" encoding="utf-8"?>
 <p:sld xmlns:a="http://schemas.openxmlformats.org/drawingml/2006/main" xmlns:r="http://schemas.openxmlformats.org/officeDocument/2006/relationships" xmlns:p="http://schemas.openxmlformats.org/presentationml/2006/main">
   <p:cSld>
     <p:spTree>
@@ -16387,7 +16870,7 @@
 </p:sld>
 </file>
 
-<file path=ppt/slides/slide14.xml><?xml version="1.0" encoding="utf-8"?>
+<file path=ppt/slides/slide18.xml><?xml version="1.0" encoding="utf-8"?>
 <p:sld xmlns:a="http://schemas.openxmlformats.org/drawingml/2006/main" xmlns:r="http://schemas.openxmlformats.org/officeDocument/2006/relationships" xmlns:p="http://schemas.openxmlformats.org/presentationml/2006/main">
   <p:cSld>
     <p:spTree>
@@ -17171,7 +17654,15 @@
           <a:p>
             <a:r>
               <a:rPr dirty="0"/>
-              <a:t>CAS found most alleged breaches were either not established or time-barred, but that City had failed to cooperate with investigators</a:t>
+              <a:t>CAS found most alleged breaches were either not established or </a:t>
+            </a:r>
+            <a:r>
+              <a:rPr lang="it-IT" dirty="0"/>
+              <a:t>too old</a:t>
+            </a:r>
+            <a:r>
+              <a:rPr dirty="0"/>
+              <a:t>, but that City had failed to cooperate with investigators</a:t>
             </a:r>
             <a:r>
               <a:rPr lang="it-IT" dirty="0"/>
@@ -17231,16 +17722,7 @@
           <a:lstStyle/>
           <a:p>
             <a:r>
-              <a:rPr dirty="0"/>
-              <a:t>Criticism #1</a:t>
-            </a:r>
-            <a:r>
-              <a:rPr lang="it-IT" dirty="0"/>
-              <a:t>: </a:t>
-            </a:r>
-            <a:r>
-              <a:rPr dirty="0"/>
-              <a:t>Does FFP Entrench the Incumbents?</a:t>
+              <a:t>Real Case: Manchester City’s 115 Charges (Premier League)</a:t>
             </a:r>
           </a:p>
         </p:txBody>
@@ -17257,64 +17739,38 @@
         </p:nvSpPr>
         <p:spPr/>
         <p:txBody>
-          <a:bodyPr wrap="square"/>
+          <a:bodyPr/>
           <a:lstStyle/>
           <a:p>
             <a:r>
               <a:rPr dirty="0"/>
-              <a:t>A break-even rule caps how much a club can spend RELATIVE TO its own revenue</a:t>
+              <a:t>Feb 2023: the Premier League charged City with 115 breaches of its financial rules (2009/10–2017/18), after a 4-year investigation</a:t>
             </a:r>
           </a:p>
           <a:p>
             <a:r>
               <a:rPr dirty="0"/>
-              <a:t>But clubs don’t start with equal revenue</a:t>
+              <a:t>Allegations: </a:t>
             </a:r>
             <a:r>
               <a:rPr lang="it-IT" dirty="0"/>
-              <a:t>,</a:t>
+              <a:t>false</a:t>
             </a:r>
             <a:r>
               <a:rPr dirty="0"/>
-              <a:t> the biggest clubs already earn the most from broadcasting, sponsorship and prize money</a:t>
+              <a:t> sponsorship deals (Etihad, Aabar, Abu Dhabi Tourism Authority) secretly funded by owner Sheikh Mansour, used to inflate revenue and mask true losses</a:t>
             </a:r>
           </a:p>
           <a:p>
             <a:r>
               <a:rPr dirty="0"/>
-              <a:t>Result: rich clubs can spend more and still comply; ambitious smaller clubs are constrained exactly when they’d need to spend heavily to break into the elite</a:t>
-            </a:r>
-          </a:p>
-          <a:p>
-            <a:r>
-              <a:rPr dirty="0">
-                <a:hlinkClick r:id="rId2">
-                  <a:extLst>
-                    <a:ext uri="{A12FA001-AC4F-418D-AE19-62706E023703}">
-                      <ahyp:hlinkClr xmlns:ahyp="http://schemas.microsoft.com/office/drawing/2018/hyperlinkcolor" val="tx"/>
-                    </a:ext>
-                  </a:extLst>
-                </a:hlinkClick>
-              </a:rPr>
-              <a:t>Peeters &amp; Szymanski</a:t>
-            </a:r>
+              <a:t>Also alleged: image-rights payments used to understate the wage bill, and hidden payments to former manager Roberto Mancini via an Abu Dhabi “consultancy” role</a:t>
+            </a:r>
+          </a:p>
+          <a:p>
             <a:r>
               <a:rPr dirty="0"/>
-              <a:t>: FFP raises club profitability mainly by suppressing wage spending, but cements the competitive advantage of incumbent top clubs</a:t>
-            </a:r>
-          </a:p>
-          <a:p>
-            <a:r>
-              <a:rPr dirty="0"/>
-              <a:t>Empirical studies (Spain, Germany, France) report fewer distinct league-title winners after FFP’s introduction</a:t>
-            </a:r>
-            <a:r>
-              <a:rPr lang="it-IT" dirty="0"/>
-              <a:t>: </a:t>
-            </a:r>
-            <a:r>
-              <a:rPr dirty="0"/>
-              <a:t>the opposite of a competitive-balance goal</a:t>
+              <a:t>City denies all charges and says it welcomes independent review of what it calls irrefutable evidence in its favor</a:t>
             </a:r>
           </a:p>
         </p:txBody>
@@ -17360,16 +17816,7 @@
           <a:lstStyle/>
           <a:p>
             <a:r>
-              <a:rPr dirty="0"/>
-              <a:t>Criticism #2</a:t>
-            </a:r>
-            <a:r>
-              <a:rPr lang="it-IT" dirty="0"/>
-              <a:t>: </a:t>
-            </a:r>
-            <a:r>
-              <a:rPr dirty="0"/>
-              <a:t>Limiting an Owner’s Own Money</a:t>
+              <a:t>Manchester City’s 115 Charges — The Verdict</a:t>
             </a:r>
           </a:p>
         </p:txBody>
@@ -17386,46 +17833,26 @@
         </p:nvSpPr>
         <p:spPr/>
         <p:txBody>
-          <a:bodyPr wrap="square"/>
+          <a:bodyPr/>
           <a:lstStyle/>
           <a:p>
             <a:r>
-              <a:rPr dirty="0"/>
-              <a:t>In an ordinary business, an owner can inject as much of their own capital as they like</a:t>
-            </a:r>
-            <a:r>
-              <a:rPr lang="it-IT" dirty="0"/>
-              <a:t>,</a:t>
-            </a:r>
-            <a:r>
-              <a:rPr dirty="0"/>
-              <a:t> no regulator stops a founder from funding losses out of pocket</a:t>
-            </a:r>
-          </a:p>
-          <a:p>
-            <a:r>
-              <a:rPr dirty="0"/>
-              <a:t>FFP caps this directly: owner equity injections beyond the allowed deviation (€30m/3 years, or €5m without owner funding) don’t exempt a club from breach</a:t>
-            </a:r>
-          </a:p>
-          <a:p>
-            <a:r>
-              <a:rPr dirty="0"/>
-              <a:t>The justification: unlimited owner subsidy would let a wealthy benefactor simply buy sporting success regardless of the club’s own economics</a:t>
-            </a:r>
-            <a:r>
-              <a:rPr lang="it-IT" dirty="0"/>
-              <a:t>, </a:t>
-            </a:r>
-            <a:r>
-              <a:rPr dirty="0"/>
-              <a:t>undermining both solvency discipline and competitive balance</a:t>
-            </a:r>
-          </a:p>
-          <a:p>
-            <a:r>
-              <a:rPr dirty="0"/>
-              <a:t>The tension: is it fair to restrict what an owner does with their own money, in a way no other industry faces?</a:t>
+              <a:t>2025: an independent commission found City guilty on all 115 charges, ruling the club used sham contracts/agreements to inflate revenue and reduce costs</a:t>
+            </a:r>
+          </a:p>
+          <a:p>
+            <a:r>
+              <a:t>Some club witnesses were found to have given false or dishonest evidence</a:t>
+            </a:r>
+          </a:p>
+          <a:p>
+            <a:r>
+              <a:t>City is appealing; sanctions are still undecided, ranging from a fine to a points deduction, or in the extreme case, expulsion</a:t>
+            </a:r>
+          </a:p>
+          <a:p>
+            <a:r>
+              <a:t>A domestic Premier League case, separate from the UEFA/CAS case on the earlier slide, but drawing on the same CFCB-style sanctions menu from slide 5</a:t>
             </a:r>
           </a:p>
         </p:txBody>
